--- a/public/fun/pack/pptx/birthdaypro/돌잔치프리미엄_18_사진중심_아쿠아스틸.pptx
+++ b/public/fun/pack/pptx/birthdaypro/돌잔치프리미엄_18_사진중심_아쿠아스틸.pptx
@@ -112,12 +112,12 @@
   <p:extLst>
     <p:ext uri="{521415D9-36F7-43E2-AB2F-B90AF26B5E84}">
       <p14:sectionLst xmlns:p14="http://schemas.microsoft.com/office/powerpoint/2010/main">
-        <p14:section name="시작" id="{E0E487CC-BB03-45DF-984C-8E537702C653}">
+        <p14:section name="시작" id="{7324D077-FE49-4AF1-AB48-2A48F9455365}">
           <p14:sldIdLst>
             <p14:sldId id="256"/>
           </p14:sldIdLst>
         </p14:section>
-        <p14:section name="본문" id="{286F25FC-69AC-43A5-BBAE-128B19CBA88C}">
+        <p14:section name="본문" id="{CCDC12C4-7970-45B7-8709-2E0FF4A73928}">
           <p14:sldIdLst>
             <p14:sldId id="257"/>
             <p14:sldId id="258"/>
@@ -125,7 +125,7 @@
             <p14:sldId id="260"/>
           </p14:sldIdLst>
         </p14:section>
-        <p14:section name="마무리" id="{33D29F17-11FC-40CD-B6AF-3AC4AA0FA688}">
+        <p14:section name="마무리" id="{2DF0E81B-51A8-42E2-AB4C-D1E9A0CE50C5}">
           <p14:sldIdLst>
             <p14:sldId id="261"/>
           </p14:sldIdLst>
@@ -2965,7 +2965,7 @@
             </a:lvl1pPr>
           </a:lstStyle>
           <a:p>
-            <a:fld id="{E36C07F4-4A37-4ADD-8973-8391EA59F6A3}" type="slidenum">
+            <a:fld id="{8AB257AC-AE56-40EC-A041-CFF782F19502}" type="slidenum">
               <a:rPr lang="en-US"/>
               <a:t>‹#›</a:t>
             </a:fld>
@@ -5100,7 +5100,7 @@
             </a:lvl1pPr>
           </a:lstStyle>
           <a:p>
-            <a:fld id="{E439CEAB-DEEA-4861-AF1C-C50F76B88F21}" type="slidenum">
+            <a:fld id="{D911AD2D-D86C-455F-9264-C46039973490}" type="slidenum">
               <a:rPr lang="en-US"/>
               <a:t>‹#›</a:t>
             </a:fld>
@@ -5737,7 +5737,7 @@
             </a:lvl1pPr>
           </a:lstStyle>
           <a:p>
-            <a:fld id="{799D038E-18AD-4111-8686-20D00D90552B}" type="slidenum">
+            <a:fld id="{F8F5B175-3A83-4EA7-BEE5-3682BB34A864}" type="slidenum">
               <a:rPr lang="en-US"/>
               <a:t>‹#›</a:t>
             </a:fld>
@@ -6576,7 +6576,7 @@
           <a:p>
             <a:r>
               <a:rPr lang="ko-KR"/>
-              <a:t>백일 사진과 지금 사진을 나란히 놓았습니다</a:t>
+              <a:t>처음 사진과 지금 사진을 나란히 놓았습니다</a:t>
             </a:r>
           </a:p>
         </p:txBody>
@@ -6598,7 +6598,7 @@
           <a:p>
             <a:r>
               <a:rPr lang="ko-KR"/>
-              <a:t>아기 이름 · 0000. 00. 00</a:t>
+              <a:t>아기 이름 · 날짜 입력</a:t>
             </a:r>
           </a:p>
           <a:p>
@@ -6759,7 +6759,7 @@
           <a:bodyPr/>
           <a:lstStyle/>
           <a:p>
-            <a:fld id="{4D8283FF-9DB7-4DFC-8007-FF11E5ECE6FC}" type="slidenum">
+            <a:fld id="{10D92A75-3395-4FC7-8AE8-99BC9C5BD3EE}" type="slidenum">
               <a:rPr lang="en-US"/>
               <a:t>‹#›</a:t>
             </a:fld>
@@ -7499,7 +7499,7 @@
           <a:bodyPr/>
           <a:lstStyle/>
           <a:p>
-            <a:fld id="{401D96BE-1E3C-416D-888F-0A35BAA3B9CB}" type="slidenum">
+            <a:fld id="{70EF25F0-ED5B-454A-ACA6-9F5799905AD9}" type="slidenum">
               <a:rPr lang="en-US"/>
               <a:t>‹#›</a:t>
             </a:fld>
@@ -7587,7 +7587,7 @@
           <a:bodyPr/>
           <a:lstStyle/>
           <a:p>
-            <a:fld id="{4BE0E40F-060E-4A95-95A7-33B7125F91C6}" type="slidenum">
+            <a:fld id="{4715497A-5AC0-4E68-AACB-813FDFEEF57B}" type="slidenum">
               <a:rPr lang="en-US"/>
               <a:t>‹#›</a:t>
             </a:fld>
@@ -9031,7 +9031,7 @@
           <a:bodyPr/>
           <a:lstStyle/>
           <a:p>
-            <a:fld id="{4F0BA477-472B-41C9-9E52-1E2783B25722}" type="slidenum">
+            <a:fld id="{0227A62E-CD5D-4E87-9B0A-AC9180C0E2F9}" type="slidenum">
               <a:rPr lang="en-US"/>
               <a:t>‹#›</a:t>
             </a:fld>
